--- a/05_발표자료/정책핏_인천_발표_v1.pptx
+++ b/05_발표자료/정책핏_인천_발표_v1.pptx
@@ -2793,24 +2793,24 @@
         </p:nvSpPr>
         <p:spPr>
           <a:xfrm>
-            <a:off x="5029200" y="1920240"/>
-            <a:ext cx="3383280" cy="1463040"/>
-          </a:xfrm>
-          <a:prstGeom prst="rect">
-            <a:avLst/>
-          </a:prstGeom>
-          <a:noFill/>
-          <a:ln/>
-        </p:spPr>
-        <p:txBody>
-          <a:bodyPr wrap="square" lIns="0" tIns="0" rIns="0" bIns="0" rtlCol="0" anchor="ctr"/>
-          <a:lstStyle/>
-          <a:p>
-            <a:pPr indent="0" marL="0">
-              <a:buNone/>
-            </a:pPr>
-            <a:r>
-              <a:rPr lang="en-US" sz="1600" b="1" dirty="0">
+            <a:off x="5029200" y="1874520"/>
+            <a:ext cx="3383280" cy="1600200"/>
+          </a:xfrm>
+          <a:prstGeom prst="rect">
+            <a:avLst/>
+          </a:prstGeom>
+          <a:noFill/>
+          <a:ln/>
+        </p:spPr>
+        <p:txBody>
+          <a:bodyPr wrap="square" lIns="0" tIns="0" rIns="0" bIns="0" rtlCol="0" anchor="ctr"/>
+          <a:lstStyle/>
+          <a:p>
+            <a:pPr indent="0" marL="0">
+              <a:buNone/>
+            </a:pPr>
+            <a:r>
+              <a:rPr lang="en-US" sz="1500" b="1" dirty="0">
                 <a:solidFill>
                   <a:srgbClr val="1A2B3C"/>
                 </a:solidFill>
@@ -2818,16 +2818,33 @@
                 <a:ea typeface="Malgun Gothic" pitchFamily="34" charset="-122"/>
                 <a:cs typeface="Malgun Gothic" pitchFamily="34" charset="-120"/>
               </a:rPr>
-              <a:t>주소 기준으로는 순유입 경향</a:t>
-            </a:r>
-            <a:endParaRPr lang="en-US" sz="1600" dirty="0"/>
-          </a:p>
-          <a:p>
-            <a:pPr indent="0" marL="0">
-              <a:buNone/>
-            </a:pPr>
-            <a:r>
-              <a:rPr lang="en-US" sz="1600" b="1" dirty="0">
+              <a:t>2025 인천 순유입률 1.1% — 전국 1위</a:t>
+            </a:r>
+            <a:endParaRPr lang="en-US" sz="1500" dirty="0"/>
+          </a:p>
+          <a:p>
+            <a:pPr indent="0" marL="0">
+              <a:buNone/>
+            </a:pPr>
+            <a:r>
+              <a:rPr lang="en-US" sz="1200" dirty="0">
+                <a:solidFill>
+                  <a:srgbClr val="8A8F98"/>
+                </a:solidFill>
+                <a:latin typeface="Malgun Gothic" pitchFamily="34" charset="0"/>
+                <a:ea typeface="Malgun Gothic" pitchFamily="34" charset="-122"/>
+                <a:cs typeface="Malgun Gothic" pitchFamily="34" charset="-120"/>
+              </a:rPr>
+              <a:t>모든 연령대 순유입은 인천이 유일 (주소 기준)</a:t>
+            </a:r>
+            <a:endParaRPr lang="en-US" sz="1500" dirty="0"/>
+          </a:p>
+          <a:p>
+            <a:pPr indent="0" marL="0">
+              <a:buNone/>
+            </a:pPr>
+            <a:r>
+              <a:rPr lang="en-US" sz="1500" b="1" dirty="0">
                 <a:solidFill>
                   <a:srgbClr val="1A2B3C"/>
                 </a:solidFill>
@@ -2835,16 +2852,16 @@
                 <a:ea typeface="Malgun Gothic" pitchFamily="34" charset="-122"/>
                 <a:cs typeface="Malgun Gothic" pitchFamily="34" charset="-120"/>
               </a:rPr>
-              <a:t>살면서, 관외로 출근한다</a:t>
-            </a:r>
-            <a:endParaRPr lang="en-US" sz="1600" dirty="0"/>
-          </a:p>
-          <a:p>
-            <a:pPr indent="0" marL="0">
-              <a:buNone/>
-            </a:pPr>
-            <a:r>
-              <a:rPr lang="en-US" sz="1250" dirty="0">
+              <a:t>청년 32.8%는 직장이 관외에</a:t>
+            </a:r>
+            <a:endParaRPr lang="en-US" sz="1500" dirty="0"/>
+          </a:p>
+          <a:p>
+            <a:pPr indent="0" marL="0">
+              <a:buNone/>
+            </a:pPr>
+            <a:r>
+              <a:rPr lang="en-US" sz="1200" dirty="0">
                 <a:solidFill>
                   <a:srgbClr val="8A8F98"/>
                 </a:solidFill>
@@ -2852,9 +2869,9 @@
                 <a:ea typeface="Malgun Gothic" pitchFamily="34" charset="-122"/>
                 <a:cs typeface="Malgun Gothic" pitchFamily="34" charset="-120"/>
               </a:rPr>
-              <a:t>임금·직무·경력전망이 선택을 좌우 — 소프트웨어가 직접 바꿀 수 없는 것들</a:t>
-            </a:r>
-            <a:endParaRPr lang="en-US" sz="1600" dirty="0"/>
+              <a:t>역외취업 사유 1위: "원하는 직무의 일자리 부재" 33.6%</a:t>
+            </a:r>
+            <a:endParaRPr lang="en-US" sz="1500" dirty="0"/>
           </a:p>
         </p:txBody>
       </p:sp>
@@ -2891,7 +2908,7 @@
                 <a:ea typeface="Malgun Gothic" pitchFamily="34" charset="-122"/>
                 <a:cs typeface="Malgun Gothic" pitchFamily="34" charset="-120"/>
               </a:rPr>
-              <a:t>근거: 국내인구이동통계·지역 통근 조사 — 증거원장 E005·E006 (수치는 원장 확정본만 인용)</a:t>
+              <a:t>출처: 통계청 2025 국내인구이동통계(A급, E005) · 인천연구원 MZ-X세대 일자리 전략 연구, 청년 2,000명 실태조사(A급, E006)</a:t>
             </a:r>
             <a:endParaRPr lang="en-US" sz="1050" dirty="0"/>
           </a:p>

--- a/05_발표자료/정책핏_인천_발표_v1.pptx
+++ b/05_발표자료/정책핏_인천_발표_v1.pptx
@@ -7905,7 +7905,7 @@
                 <a:ea typeface="Malgun Gothic" pitchFamily="34" charset="-122"/>
                 <a:cs typeface="Malgun Gothic" pitchFamily="34" charset="-120"/>
               </a:rPr>
-              <a:t>자체 정답셋 16건 실측 — 2인 교차판정 전 잠정치</a:t>
+              <a:t>자체 정답셋 31건 실측 — 2인 교차판정 전 잠정치</a:t>
             </a:r>
             <a:endParaRPr lang="en-US" sz="1300" dirty="0"/>
           </a:p>

--- a/05_발표자료/정책핏_인천_발표_v1.pptx
+++ b/05_발표자료/정책핏_인천_발표_v1.pptx
@@ -2835,7 +2835,7 @@
                 <a:ea typeface="Malgun Gothic" pitchFamily="34" charset="-122"/>
                 <a:cs typeface="Malgun Gothic" pitchFamily="34" charset="-120"/>
               </a:rPr>
-              <a:t>모든 연령대 순유입은 인천이 유일 (주소 기준)</a:t>
+              <a:t>인천은 모든 연령대에서 순유입 (주민등록 주소 기준)</a:t>
             </a:r>
             <a:endParaRPr lang="en-US" sz="1500" dirty="0"/>
           </a:p>
@@ -3789,7 +3789,7 @@
                 <a:ea typeface="Malgun Gothic" pitchFamily="34" charset="-122"/>
                 <a:cs typeface="Malgun Gothic" pitchFamily="34" charset="-120"/>
               </a:rPr>
-              <a:t>실제 인천의 결정은 대부분 기존사업 조정이다  </a:t>
+              <a:t>인천 청년정책의 결정은 대부분 기존사업 조정이다  </a:t>
             </a:r>
             <a:pPr indent="0" marL="0">
               <a:buNone/>
@@ -8528,7 +8528,7 @@
                 <a:ea typeface="Malgun Gothic" pitchFamily="34" charset="-122"/>
                 <a:cs typeface="Malgun Gothic" pitchFamily="34" charset="-120"/>
               </a:rPr>
-              <a:t>공개데이터만으로 정책 인과효과는 증명 불가 → 기관 협약 후 익명 코호트로.</a:t>
+              <a:t>공개데이터만으로 정책 인과효과는 증명 불가. 수요신호 일부는 가상 표본 — 화면에 그대로 표기.</a:t>
             </a:r>
             <a:endParaRPr lang="en-US" sz="1250" dirty="0"/>
           </a:p>
@@ -8545,7 +8545,7 @@
                 <a:ea typeface="Malgun Gothic" pitchFamily="34" charset="-122"/>
                 <a:cs typeface="Malgun Gothic" pitchFamily="34" charset="-120"/>
               </a:rPr>
-              <a:t>개인정보 사용 0 (설계상 금지). 수요신호 일부는 가상 표본 — 화면에 그대로 표기.</a:t>
+              <a:t>개인정보 사용 0 (설계상 금지). 실제 공무원 검증은 아직 받지 않았습니다.</a:t>
             </a:r>
             <a:endParaRPr lang="en-US" sz="1250" dirty="0"/>
           </a:p>
@@ -8584,7 +8584,7 @@
                 <a:ea typeface="Malgun Gothic" pitchFamily="34" charset="-122"/>
                 <a:cs typeface="Malgun Gothic" pitchFamily="34" charset="-120"/>
               </a:rPr>
-              <a:t>오늘 보인 확장</a:t>
+              <a:t>측정 설계</a:t>
             </a:r>
             <a:endParaRPr lang="en-US" sz="1500" dirty="0"/>
           </a:p>
@@ -8623,7 +8623,7 @@
                 <a:ea typeface="Malgun Gothic" pitchFamily="34" charset="-122"/>
                 <a:cs typeface="Malgun Gothic" pitchFamily="34" charset="-120"/>
               </a:rPr>
-              <a:t>산업 선택 → 정책 풀에서 관련 정책 자동 결합 (바이오 16건 실작동).</a:t>
+              <a:t>효과를 측정했다가 아니라, 어떻게 잴지와 무엇이 나오면 실패인지를 미리 정했습니다.</a:t>
             </a:r>
             <a:endParaRPr lang="en-US" sz="1250" dirty="0"/>
           </a:p>
@@ -8640,7 +8640,7 @@
                 <a:ea typeface="Malgun Gothic" pitchFamily="34" charset="-122"/>
                 <a:cs typeface="Malgun Gothic" pitchFamily="34" charset="-120"/>
               </a:rPr>
-              <a:t>풀 갱신 = 스크립트 재실행 → 스케줄러에 걸면 백그라운드 업데이트.</a:t>
+              <a:t>주지표 K1: 검토서 초안까지의 작업 단계 수 — 줄지 않으면 실패로 기록 (08_효과측정_설계).</a:t>
             </a:r>
             <a:endParaRPr lang="en-US" sz="1250" dirty="0"/>
           </a:p>
@@ -8735,7 +8735,7 @@
                 <a:ea typeface="Malgun Gothic" pitchFamily="34" charset="-122"/>
                 <a:cs typeface="Malgun Gothic" pitchFamily="34" charset="-120"/>
               </a:rPr>
-              <a:t>이 사슬의 끝은 하나 — 정책이 이어져야 청년이 인천에 정착한다.</a:t>
+              <a:t>정책이 이어지는 것은 청년 정착의 충분조건이 아니라 전제조건입니다.</a:t>
             </a:r>
             <a:endParaRPr lang="en-US" sz="1250" dirty="0"/>
           </a:p>
@@ -8774,7 +8774,7 @@
                 <a:ea typeface="Malgun Gothic" pitchFamily="34" charset="-122"/>
                 <a:cs typeface="Malgun Gothic" pitchFamily="34" charset="-120"/>
               </a:rPr>
-              <a:t>정책핏 인천 — 판단은 사람이, 근거는 그래프가</a:t>
+              <a:t>정책핏 인천 — 판단은 사람이, 근거는 그래프가  ·  근거: A3 워크플로우 맵(E020) · 통계청·인천연구원(E005·E006)</a:t>
             </a:r>
             <a:endParaRPr lang="en-US" sz="1400" dirty="0"/>
           </a:p>

--- a/05_발표자료/정책핏_인천_발표_v1.pptx
+++ b/05_발표자료/정책핏_인천_발표_v1.pptx
@@ -202,9 +202,9 @@
           </c:dLbls>
           <c:cat>
             <c:multiLvlStrRef>
-              <c:f>Sheet1!$A$2:$A$5</c:f>
+              <c:f>Sheet1!$A$2:$A$6</c:f>
               <c:multiLvlStrCache>
-                <c:ptCount val="4"/>
+                <c:ptCount val="5"/>
                 <c:lvl>
                   <c:pt idx="0">
                     <c:v>v2</c:v>
@@ -216,7 +216,10 @@
                     <c:v>v4</c:v>
                   </c:pt>
                   <c:pt idx="3">
-                    <c:v>v6 최종</c:v>
+                    <c:v>v6</c:v>
+                  </c:pt>
+                  <c:pt idx="4">
+                    <c:v>v7</c:v>
                   </c:pt>
                 </c:lvl>
               </c:multiLvlStrCache>
@@ -224,10 +227,10 @@
           </c:cat>
           <c:val>
             <c:numRef>
-              <c:f>Sheet1!$B$2:$B$5</c:f>
+              <c:f>Sheet1!$B$2:$B$6</c:f>
               <c:numCache>
                 <c:formatCode>General</c:formatCode>
-                <c:ptCount val="4"/>
+                <c:ptCount val="5"/>
                 <c:pt idx="0">
                   <c:v>42</c:v>
                 </c:pt>
@@ -238,6 +241,9 @@
                   <c:v>92</c:v>
                 </c:pt>
                 <c:pt idx="3">
+                  <c:v>100</c:v>
+                </c:pt>
+                <c:pt idx="4">
                   <c:v>100</c:v>
                 </c:pt>
               </c:numCache>
@@ -7905,7 +7911,7 @@
                 <a:ea typeface="Malgun Gothic" pitchFamily="34" charset="-122"/>
                 <a:cs typeface="Malgun Gothic" pitchFamily="34" charset="-120"/>
               </a:rPr>
-              <a:t>자체 정답셋 31건 실측 — 2인 교차판정 전 잠정치</a:t>
+              <a:t>자체 정답셋 36건 실측 (2026-08-13, E022) — 2인 교차판정 전 잠정치 · 네 지표 중 둘은 100%가 아닙니다</a:t>
             </a:r>
             <a:endParaRPr lang="en-US" sz="1300" dirty="0"/>
           </a:p>
@@ -7987,7 +7993,7 @@
                 <a:ea typeface="Malgun Gothic" pitchFamily="34" charset="-122"/>
                 <a:cs typeface="Malgun Gothic" pitchFamily="34" charset="-120"/>
               </a:rPr>
-              <a:t>89%</a:t>
+              <a:t>91%</a:t>
             </a:r>
             <a:endParaRPr lang="en-US" sz="2400" dirty="0"/>
           </a:p>
@@ -8043,7 +8049,7 @@
                 <a:ea typeface="Malgun Gothic" pitchFamily="34" charset="-122"/>
                 <a:cs typeface="Malgun Gothic" pitchFamily="34" charset="-120"/>
               </a:rPr>
-              <a:t>100%이 아닙니다 — 실측 그대로</a:t>
+              <a:t>9%는 모델이 원문을 그대로 복사하지 못했습니다</a:t>
             </a:r>
             <a:endParaRPr lang="en-US" sz="1200" dirty="0"/>
           </a:p>
@@ -8070,7 +8076,7 @@
           </a:solidFill>
           <a:ln w="15240">
             <a:solidFill>
-              <a:srgbClr val="0E5A8A"/>
+              <a:srgbClr val="C75000"/>
             </a:solidFill>
             <a:prstDash val="solid"/>
           </a:ln>
@@ -8103,13 +8109,13 @@
             <a:r>
               <a:rPr lang="en-US" sz="2400" b="1" dirty="0">
                 <a:solidFill>
-                  <a:srgbClr val="0E5A8A"/>
-                </a:solidFill>
-                <a:latin typeface="Malgun Gothic" pitchFamily="34" charset="0"/>
-                <a:ea typeface="Malgun Gothic" pitchFamily="34" charset="-122"/>
-                <a:cs typeface="Malgun Gothic" pitchFamily="34" charset="-120"/>
-              </a:rPr>
-              <a:t>100%</a:t>
+                  <a:srgbClr val="C75000"/>
+                </a:solidFill>
+                <a:latin typeface="Malgun Gothic" pitchFamily="34" charset="0"/>
+                <a:ea typeface="Malgun Gothic" pitchFamily="34" charset="-122"/>
+                <a:cs typeface="Malgun Gothic" pitchFamily="34" charset="-120"/>
+              </a:rPr>
+              <a:t>89%</a:t>
             </a:r>
             <a:endParaRPr lang="en-US" sz="2400" dirty="0"/>
           </a:p>
@@ -8165,7 +8171,7 @@
                 <a:ea typeface="Malgun Gothic" pitchFamily="34" charset="-122"/>
                 <a:cs typeface="Malgun Gothic" pitchFamily="34" charset="-120"/>
               </a:rPr>
-              <a:t>모르면 '모름'이라 말한 비율</a:t>
+              <a:t>양성 통제군을 넣자 100%가 89%로 내려갔습니다</a:t>
             </a:r>
             <a:endParaRPr lang="en-US" sz="1200" dirty="0"/>
           </a:p>
@@ -8287,7 +8293,7 @@
                 <a:ea typeface="Malgun Gothic" pitchFamily="34" charset="-122"/>
                 <a:cs typeface="Malgun Gothic" pitchFamily="34" charset="-120"/>
               </a:rPr>
-              <a:t>의도적 병행을 중복으로 안 몬 비율</a:t>
+              <a:t>의도적 병행을 중복으로 몰지 않은 비율</a:t>
             </a:r>
             <a:endParaRPr lang="en-US" sz="1200" dirty="0"/>
           </a:p>
@@ -8379,7 +8385,7 @@
                 <a:ea typeface="Malgun Gothic" pitchFamily="34" charset="-122"/>
                 <a:cs typeface="Malgun Gothic" pitchFamily="34" charset="-120"/>
               </a:rPr>
-              <a:t>전 과정 결정로그 D-001~D-016 · 프롬프트 v2→v6 반복은 정답셋 실측으로 유도됨</a:t>
+              <a:t>전 과정 결정로그 D-001~D-022 · 프롬프트 v2→v7 반복은 전부 정답셋 실측이 유도했다</a:t>
             </a:r>
             <a:endParaRPr lang="en-US" sz="1050" dirty="0"/>
           </a:p>

--- a/05_발표자료/정책핏_인천_발표_v1.pptx
+++ b/05_발표자료/정책핏_인천_발표_v1.pptx
@@ -202,9 +202,9 @@
           </c:dLbls>
           <c:cat>
             <c:multiLvlStrRef>
-              <c:f>Sheet1!$A$2:$A$6</c:f>
+              <c:f>Sheet1!$A$2:$A$5</c:f>
               <c:multiLvlStrCache>
-                <c:ptCount val="5"/>
+                <c:ptCount val="4"/>
                 <c:lvl>
                   <c:pt idx="0">
                     <c:v>v2</c:v>
@@ -213,13 +213,10 @@
                     <c:v>v3</c:v>
                   </c:pt>
                   <c:pt idx="2">
-                    <c:v>v4</c:v>
+                    <c:v>v6</c:v>
                   </c:pt>
                   <c:pt idx="3">
-                    <c:v>v6</c:v>
-                  </c:pt>
-                  <c:pt idx="4">
-                    <c:v>v7</c:v>
+                    <c:v>v9</c:v>
                   </c:pt>
                 </c:lvl>
               </c:multiLvlStrCache>
@@ -227,10 +224,10 @@
           </c:cat>
           <c:val>
             <c:numRef>
-              <c:f>Sheet1!$B$2:$B$6</c:f>
+              <c:f>Sheet1!$B$2:$B$5</c:f>
               <c:numCache>
                 <c:formatCode>General</c:formatCode>
-                <c:ptCount val="5"/>
+                <c:ptCount val="4"/>
                 <c:pt idx="0">
                   <c:v>42</c:v>
                 </c:pt>
@@ -238,12 +235,9 @@
                   <c:v>92</c:v>
                 </c:pt>
                 <c:pt idx="2">
-                  <c:v>92</c:v>
+                  <c:v>100</c:v>
                 </c:pt>
                 <c:pt idx="3">
-                  <c:v>100</c:v>
-                </c:pt>
-                <c:pt idx="4">
                   <c:v>100</c:v>
                 </c:pt>
               </c:numCache>
@@ -7911,7 +7905,7 @@
                 <a:ea typeface="Malgun Gothic" pitchFamily="34" charset="-122"/>
                 <a:cs typeface="Malgun Gothic" pitchFamily="34" charset="-120"/>
               </a:rPr>
-              <a:t>자체 정답셋 36건 실측 (2026-08-13, E022) — 2인 교차판정 전 잠정치 · 네 지표 중 둘은 100%가 아닙니다</a:t>
+              <a:t>자체 정답셋 37건 실측 (2026-08-13, E022) — 2인 교차판정 전 잠정치 · 인용 실재율은 100%가 아닙니다</a:t>
             </a:r>
             <a:endParaRPr lang="en-US" sz="1300" dirty="0"/>
           </a:p>
@@ -7993,7 +7987,7 @@
                 <a:ea typeface="Malgun Gothic" pitchFamily="34" charset="-122"/>
                 <a:cs typeface="Malgun Gothic" pitchFamily="34" charset="-120"/>
               </a:rPr>
-              <a:t>91%</a:t>
+              <a:t>81%</a:t>
             </a:r>
             <a:endParaRPr lang="en-US" sz="2400" dirty="0"/>
           </a:p>
@@ -8049,7 +8043,7 @@
                 <a:ea typeface="Malgun Gothic" pitchFamily="34" charset="-122"/>
                 <a:cs typeface="Malgun Gothic" pitchFamily="34" charset="-120"/>
               </a:rPr>
-              <a:t>9%는 모델이 원문을 그대로 복사하지 못했습니다</a:t>
+              <a:t>필드가 늘며 91%에서 내려갔습니다 — 실측 그대로</a:t>
             </a:r>
             <a:endParaRPr lang="en-US" sz="1200" dirty="0"/>
           </a:p>
@@ -8064,128 +8058,6 @@
         <p:spPr>
           <a:xfrm>
             <a:off x="4572000" y="2103120"/>
-            <a:ext cx="4114800" cy="685800"/>
-          </a:xfrm>
-          <a:prstGeom prst="roundRect">
-            <a:avLst>
-              <a:gd name="adj" fmla="val 6667"/>
-            </a:avLst>
-          </a:prstGeom>
-          <a:solidFill>
-            <a:srgbClr val="FFFFFF"/>
-          </a:solidFill>
-          <a:ln w="15240">
-            <a:solidFill>
-              <a:srgbClr val="C75000"/>
-            </a:solidFill>
-            <a:prstDash val="solid"/>
-          </a:ln>
-        </p:spPr>
-      </p:sp>
-      <p:sp>
-        <p:nvSpPr>
-          <p:cNvPr id="9" name="Text 6"/>
-          <p:cNvSpPr/>
-          <p:nvPr/>
-        </p:nvSpPr>
-        <p:spPr>
-          <a:xfrm>
-            <a:off x="4709160" y="2176272"/>
-            <a:ext cx="1005840" cy="548640"/>
-          </a:xfrm>
-          <a:prstGeom prst="rect">
-            <a:avLst/>
-          </a:prstGeom>
-          <a:noFill/>
-          <a:ln/>
-        </p:spPr>
-        <p:txBody>
-          <a:bodyPr wrap="square" lIns="0" tIns="0" rIns="0" bIns="0" rtlCol="0" anchor="ctr"/>
-          <a:lstStyle/>
-          <a:p>
-            <a:pPr indent="0" marL="0">
-              <a:buNone/>
-            </a:pPr>
-            <a:r>
-              <a:rPr lang="en-US" sz="2400" b="1" dirty="0">
-                <a:solidFill>
-                  <a:srgbClr val="C75000"/>
-                </a:solidFill>
-                <a:latin typeface="Malgun Gothic" pitchFamily="34" charset="0"/>
-                <a:ea typeface="Malgun Gothic" pitchFamily="34" charset="-122"/>
-                <a:cs typeface="Malgun Gothic" pitchFamily="34" charset="-120"/>
-              </a:rPr>
-              <a:t>89%</a:t>
-            </a:r>
-            <a:endParaRPr lang="en-US" sz="2400" dirty="0"/>
-          </a:p>
-        </p:txBody>
-      </p:sp>
-      <p:sp>
-        <p:nvSpPr>
-          <p:cNvPr id="10" name="Text 7"/>
-          <p:cNvSpPr/>
-          <p:nvPr/>
-        </p:nvSpPr>
-        <p:spPr>
-          <a:xfrm>
-            <a:off x="5760720" y="2176272"/>
-            <a:ext cx="2834640" cy="548640"/>
-          </a:xfrm>
-          <a:prstGeom prst="rect">
-            <a:avLst/>
-          </a:prstGeom>
-          <a:noFill/>
-          <a:ln/>
-        </p:spPr>
-        <p:txBody>
-          <a:bodyPr wrap="square" lIns="0" tIns="0" rIns="0" bIns="0" rtlCol="0" anchor="ctr"/>
-          <a:lstStyle/>
-          <a:p>
-            <a:pPr indent="0" marL="0">
-              <a:buNone/>
-            </a:pPr>
-            <a:r>
-              <a:rPr lang="en-US" sz="1200" b="1" dirty="0">
-                <a:solidFill>
-                  <a:srgbClr val="1A2B3C"/>
-                </a:solidFill>
-                <a:latin typeface="Malgun Gothic" pitchFamily="34" charset="0"/>
-                <a:ea typeface="Malgun Gothic" pitchFamily="34" charset="-122"/>
-                <a:cs typeface="Malgun Gothic" pitchFamily="34" charset="-120"/>
-              </a:rPr>
-              <a:t>기권 정확도</a:t>
-            </a:r>
-            <a:endParaRPr lang="en-US" sz="1200" dirty="0"/>
-          </a:p>
-          <a:p>
-            <a:pPr indent="0" marL="0">
-              <a:buNone/>
-            </a:pPr>
-            <a:r>
-              <a:rPr lang="en-US" sz="1050" dirty="0">
-                <a:solidFill>
-                  <a:srgbClr val="8A8F98"/>
-                </a:solidFill>
-                <a:latin typeface="Malgun Gothic" pitchFamily="34" charset="0"/>
-                <a:ea typeface="Malgun Gothic" pitchFamily="34" charset="-122"/>
-                <a:cs typeface="Malgun Gothic" pitchFamily="34" charset="-120"/>
-              </a:rPr>
-              <a:t>양성 통제군을 넣자 100%가 89%로 내려갔습니다</a:t>
-            </a:r>
-            <a:endParaRPr lang="en-US" sz="1200" dirty="0"/>
-          </a:p>
-        </p:txBody>
-      </p:sp>
-      <p:sp>
-        <p:nvSpPr>
-          <p:cNvPr id="11" name="Shape 8"/>
-          <p:cNvSpPr/>
-          <p:nvPr/>
-        </p:nvSpPr>
-        <p:spPr>
-          <a:xfrm>
-            <a:off x="4572000" y="2880360"/>
             <a:ext cx="4114800" cy="685800"/>
           </a:xfrm>
           <a:prstGeom prst="roundRect">
@@ -8206,6 +8078,128 @@
       </p:sp>
       <p:sp>
         <p:nvSpPr>
+          <p:cNvPr id="9" name="Text 6"/>
+          <p:cNvSpPr/>
+          <p:nvPr/>
+        </p:nvSpPr>
+        <p:spPr>
+          <a:xfrm>
+            <a:off x="4709160" y="2176272"/>
+            <a:ext cx="1005840" cy="548640"/>
+          </a:xfrm>
+          <a:prstGeom prst="rect">
+            <a:avLst/>
+          </a:prstGeom>
+          <a:noFill/>
+          <a:ln/>
+        </p:spPr>
+        <p:txBody>
+          <a:bodyPr wrap="square" lIns="0" tIns="0" rIns="0" bIns="0" rtlCol="0" anchor="ctr"/>
+          <a:lstStyle/>
+          <a:p>
+            <a:pPr indent="0" marL="0">
+              <a:buNone/>
+            </a:pPr>
+            <a:r>
+              <a:rPr lang="en-US" sz="2400" b="1" dirty="0">
+                <a:solidFill>
+                  <a:srgbClr val="1E7F4F"/>
+                </a:solidFill>
+                <a:latin typeface="Malgun Gothic" pitchFamily="34" charset="0"/>
+                <a:ea typeface="Malgun Gothic" pitchFamily="34" charset="-122"/>
+                <a:cs typeface="Malgun Gothic" pitchFamily="34" charset="-120"/>
+              </a:rPr>
+              <a:t>100%</a:t>
+            </a:r>
+            <a:endParaRPr lang="en-US" sz="2400" dirty="0"/>
+          </a:p>
+        </p:txBody>
+      </p:sp>
+      <p:sp>
+        <p:nvSpPr>
+          <p:cNvPr id="10" name="Text 7"/>
+          <p:cNvSpPr/>
+          <p:nvPr/>
+        </p:nvSpPr>
+        <p:spPr>
+          <a:xfrm>
+            <a:off x="5760720" y="2176272"/>
+            <a:ext cx="2834640" cy="548640"/>
+          </a:xfrm>
+          <a:prstGeom prst="rect">
+            <a:avLst/>
+          </a:prstGeom>
+          <a:noFill/>
+          <a:ln/>
+        </p:spPr>
+        <p:txBody>
+          <a:bodyPr wrap="square" lIns="0" tIns="0" rIns="0" bIns="0" rtlCol="0" anchor="ctr"/>
+          <a:lstStyle/>
+          <a:p>
+            <a:pPr indent="0" marL="0">
+              <a:buNone/>
+            </a:pPr>
+            <a:r>
+              <a:rPr lang="en-US" sz="1200" b="1" dirty="0">
+                <a:solidFill>
+                  <a:srgbClr val="1A2B3C"/>
+                </a:solidFill>
+                <a:latin typeface="Malgun Gothic" pitchFamily="34" charset="0"/>
+                <a:ea typeface="Malgun Gothic" pitchFamily="34" charset="-122"/>
+                <a:cs typeface="Malgun Gothic" pitchFamily="34" charset="-120"/>
+              </a:rPr>
+              <a:t>기권 정확도</a:t>
+            </a:r>
+            <a:endParaRPr lang="en-US" sz="1200" dirty="0"/>
+          </a:p>
+          <a:p>
+            <a:pPr indent="0" marL="0">
+              <a:buNone/>
+            </a:pPr>
+            <a:r>
+              <a:rPr lang="en-US" sz="1050" dirty="0">
+                <a:solidFill>
+                  <a:srgbClr val="8A8F98"/>
+                </a:solidFill>
+                <a:latin typeface="Malgun Gothic" pitchFamily="34" charset="0"/>
+                <a:ea typeface="Malgun Gothic" pitchFamily="34" charset="-122"/>
+                <a:cs typeface="Malgun Gothic" pitchFamily="34" charset="-120"/>
+              </a:rPr>
+              <a:t>양성 통제군을 넣어 판별력을 확보한 뒤의 값</a:t>
+            </a:r>
+            <a:endParaRPr lang="en-US" sz="1200" dirty="0"/>
+          </a:p>
+        </p:txBody>
+      </p:sp>
+      <p:sp>
+        <p:nvSpPr>
+          <p:cNvPr id="11" name="Shape 8"/>
+          <p:cNvSpPr/>
+          <p:nvPr/>
+        </p:nvSpPr>
+        <p:spPr>
+          <a:xfrm>
+            <a:off x="4572000" y="2880360"/>
+            <a:ext cx="4114800" cy="685800"/>
+          </a:xfrm>
+          <a:prstGeom prst="roundRect">
+            <a:avLst>
+              <a:gd name="adj" fmla="val 6667"/>
+            </a:avLst>
+          </a:prstGeom>
+          <a:solidFill>
+            <a:srgbClr val="FFFFFF"/>
+          </a:solidFill>
+          <a:ln w="15240">
+            <a:solidFill>
+              <a:srgbClr val="1E7F4F"/>
+            </a:solidFill>
+            <a:prstDash val="solid"/>
+          </a:ln>
+        </p:spPr>
+      </p:sp>
+      <p:sp>
+        <p:nvSpPr>
           <p:cNvPr id="12" name="Text 9"/>
           <p:cNvSpPr/>
           <p:nvPr/>
@@ -8276,7 +8270,7 @@
                 <a:ea typeface="Malgun Gothic" pitchFamily="34" charset="-122"/>
                 <a:cs typeface="Malgun Gothic" pitchFamily="34" charset="-120"/>
               </a:rPr>
-              <a:t>중첩 오판 회피</a:t>
+              <a:t>중첩 판정</a:t>
             </a:r>
             <a:endParaRPr lang="en-US" sz="1200" dirty="0"/>
           </a:p>
@@ -8293,7 +8287,7 @@
                 <a:ea typeface="Malgun Gothic" pitchFamily="34" charset="-122"/>
                 <a:cs typeface="Malgun Gothic" pitchFamily="34" charset="-120"/>
               </a:rPr>
-              <a:t>의도적 병행을 중복으로 몰지 않은 비율</a:t>
+              <a:t>수단 축을 넣기 전에는 0%였습니다</a:t>
             </a:r>
             <a:endParaRPr lang="en-US" sz="1200" dirty="0"/>
           </a:p>
@@ -8385,7 +8379,7 @@
                 <a:ea typeface="Malgun Gothic" pitchFamily="34" charset="-122"/>
                 <a:cs typeface="Malgun Gothic" pitchFamily="34" charset="-120"/>
               </a:rPr>
-              <a:t>전 과정 결정로그 D-001~D-022 · 프롬프트 v2→v7 반복은 전부 정답셋 실측이 유도했다</a:t>
+              <a:t>전 과정 결정로그 D-001~D-023 · 프롬프트 v2→v9 반복은 전부 정답셋과 워크스루가 유도했다</a:t>
             </a:r>
             <a:endParaRPr lang="en-US" sz="1050" dirty="0"/>
           </a:p>

--- a/05_발표자료/정책핏_인천_발표_v1.pptx
+++ b/05_발표자료/정책핏_인천_발표_v1.pptx
@@ -8043,7 +8043,7 @@
                 <a:ea typeface="Malgun Gothic" pitchFamily="34" charset="-122"/>
                 <a:cs typeface="Malgun Gothic" pitchFamily="34" charset="-120"/>
               </a:rPr>
-              <a:t>필드가 늘며 91%에서 내려갔습니다 — 실측 그대로</a:t>
+              <a:t>인용 84개 중 68개. 실패는 전부 분류 라벨 — 지어낸 인용 0건</a:t>
             </a:r>
             <a:endParaRPr lang="en-US" sz="1200" dirty="0"/>
           </a:p>
@@ -8287,7 +8287,7 @@
                 <a:ea typeface="Malgun Gothic" pitchFamily="34" charset="-122"/>
                 <a:cs typeface="Malgun Gothic" pitchFamily="34" charset="-120"/>
               </a:rPr>
-              <a:t>수단 축을 넣기 전에는 0%였습니다</a:t>
+              <a:t>수단 축을 넣기 전에는 검출 건수가 0건이었습니다 (n=3)</a:t>
             </a:r>
             <a:endParaRPr lang="en-US" sz="1200" dirty="0"/>
           </a:p>
@@ -8379,7 +8379,7 @@
                 <a:ea typeface="Malgun Gothic" pitchFamily="34" charset="-122"/>
                 <a:cs typeface="Malgun Gothic" pitchFamily="34" charset="-120"/>
               </a:rPr>
-              <a:t>전 과정 결정로그 D-001~D-023 · 프롬프트 v2→v9 반복은 전부 정답셋과 워크스루가 유도했다</a:t>
+              <a:t>전 과정 결정로그 D-001~D-023 · 프롬프트 v2→v7 반복은 전부 정답셋과 워크스루가 유도했다</a:t>
             </a:r>
             <a:endParaRPr lang="en-US" sz="1050" dirty="0"/>
           </a:p>
